--- a/04_Final_Abgabe_v2_1/04_Decks/AMAVIO_Living_Investor_Readiness_Deck_v3_2_FINAL.pptx
+++ b/04_Final_Abgabe_v2_1/04_Decks/AMAVIO_Living_Investor_Readiness_Deck_v3_2_FINAL.pptx
@@ -550,7 +550,7 @@
           </a:p>
           <a:p xmlns:a="http://schemas.openxmlformats.org/drawingml/2006/main">
             <a:r>
-              <a:t>- Internal: AMAVIO Businessplan v1.7 und 36-Monats-Finanzmodell v1.7 (interne Planannahmen, Stand 28. Juli 2026).</a:t>
+              <a:t>- Internal: AMAVIO Businessplan v2.2 und 36-Monats-Finanzmodell v1.8 (interne Planannahmen, Stand 28. Juli 2026).</a:t>
             </a:r>
           </a:p>
           <a:p xmlns:a="http://schemas.openxmlformats.org/drawingml/2006/main">
@@ -635,7 +635,7 @@
           </a:p>
           <a:p xmlns:a="http://schemas.openxmlformats.org/drawingml/2006/main">
             <a:r>
-              <a:t>- Internal: AMAVIO Businessplan v1.7 und 36-Monats-Finanzmodell v1.7 (interne Planannahmen, Stand 28. Juli 2026).</a:t>
+              <a:t>- Internal: AMAVIO Businessplan v2.2 und 36-Monats-Finanzmodell v1.8 (interne Planannahmen, Stand 28. Juli 2026).</a:t>
             </a:r>
           </a:p>
           <a:p xmlns:a="http://schemas.openxmlformats.org/drawingml/2006/main">
@@ -720,7 +720,7 @@
           </a:p>
           <a:p xmlns:a="http://schemas.openxmlformats.org/drawingml/2006/main">
             <a:r>
-              <a:t>- Internal: AMAVIO Businessplan v1.7 und 36-Monats-Finanzmodell v1.7 (interne Planannahmen, Stand 28. Juli 2026).</a:t>
+              <a:t>- Internal: AMAVIO Businessplan v2.2 und 36-Monats-Finanzmodell v1.8 (interne Planannahmen, Stand 28. Juli 2026).</a:t>
             </a:r>
           </a:p>
           <a:p xmlns:a="http://schemas.openxmlformats.org/drawingml/2006/main">
@@ -805,7 +805,7 @@
           </a:p>
           <a:p xmlns:a="http://schemas.openxmlformats.org/drawingml/2006/main">
             <a:r>
-              <a:t>- Internal: AMAVIO Businessplan v1.7 und 36-Monats-Finanzmodell v1.7 (interne Planannahmen, Stand 28. Juli 2026).</a:t>
+              <a:t>- Internal: AMAVIO Businessplan v2.2 und 36-Monats-Finanzmodell v1.8 (interne Planannahmen, Stand 28. Juli 2026).</a:t>
             </a:r>
           </a:p>
           <a:p xmlns:a="http://schemas.openxmlformats.org/drawingml/2006/main">
@@ -890,7 +890,7 @@
           </a:p>
           <a:p xmlns:a="http://schemas.openxmlformats.org/drawingml/2006/main">
             <a:r>
-              <a:t>- Internal: AMAVIO Businessplan v1.7 und 36-Monats-Finanzmodell v1.7 (interne Planannahmen, Stand 28. Juli 2026).</a:t>
+              <a:t>- Internal: AMAVIO Businessplan v2.2 und 36-Monats-Finanzmodell v1.8 (interne Planannahmen, Stand 28. Juli 2026).</a:t>
             </a:r>
           </a:p>
           <a:p xmlns:a="http://schemas.openxmlformats.org/drawingml/2006/main">
@@ -975,7 +975,7 @@
           </a:p>
           <a:p xmlns:a="http://schemas.openxmlformats.org/drawingml/2006/main">
             <a:r>
-              <a:t>- Internal: AMAVIO Businessplan v1.7 und 36-Monats-Finanzmodell v1.7 (interne Planannahmen, Stand 28. Juli 2026).</a:t>
+              <a:t>- Internal: AMAVIO Businessplan v2.2 und 36-Monats-Finanzmodell v1.8 (interne Planannahmen, Stand 28. Juli 2026).</a:t>
             </a:r>
           </a:p>
           <a:p xmlns:a="http://schemas.openxmlformats.org/drawingml/2006/main">
@@ -1060,7 +1060,7 @@
           </a:p>
           <a:p xmlns:a="http://schemas.openxmlformats.org/drawingml/2006/main">
             <a:r>
-              <a:t>- Internal: AMAVIO Businessplan v1.7 und 36-Monats-Finanzmodell v1.7 (interne Planannahmen, Stand 28. Juli 2026).</a:t>
+              <a:t>- Internal: AMAVIO Businessplan v2.2 und 36-Monats-Finanzmodell v1.8 (interne Planannahmen, Stand 28. Juli 2026).</a:t>
             </a:r>
           </a:p>
           <a:p xmlns:a="http://schemas.openxmlformats.org/drawingml/2006/main">
@@ -1145,7 +1145,7 @@
           </a:p>
           <a:p xmlns:a="http://schemas.openxmlformats.org/drawingml/2006/main">
             <a:r>
-              <a:t>- Internal: AMAVIO Businessplan v1.7 und 36-Monats-Finanzmodell v1.7 (interne Planannahmen, Stand 28. Juli 2026).</a:t>
+              <a:t>- Internal: AMAVIO Businessplan v2.2 und 36-Monats-Finanzmodell v1.8 (interne Planannahmen, Stand 28. Juli 2026).</a:t>
             </a:r>
           </a:p>
           <a:p xmlns:a="http://schemas.openxmlformats.org/drawingml/2006/main">
@@ -1230,7 +1230,7 @@
           </a:p>
           <a:p xmlns:a="http://schemas.openxmlformats.org/drawingml/2006/main">
             <a:r>
-              <a:t>- Internal: AMAVIO Businessplan v1.7 und 36-Monats-Finanzmodell v1.7 (interne Planannahmen, Stand 28. Juli 2026).</a:t>
+              <a:t>- Internal: AMAVIO Businessplan v2.2 und 36-Monats-Finanzmodell v1.8 (interne Planannahmen, Stand 28. Juli 2026).</a:t>
             </a:r>
           </a:p>
           <a:p xmlns:a="http://schemas.openxmlformats.org/drawingml/2006/main">
@@ -5869,7 +5869,7 @@
                   <a:srgbClr val="667785"/>
                 </a:solidFill>
               </a:rPr>
-              <a:t>Quelle: internes 36-Monats-Finanzmodell v1.7; alle Werte sind steuerbare Planannahmen.</a:t>
+              <a:t>Quelle: internes 36-Monats-Finanzmodell v1.8; alle Werte sind steuerbare Planannahmen.</a:t>
             </a:r>
           </a:p>
         </p:txBody>
